--- a/public/fun/pack/pptx/news/카드뉴스_44_감사·칭찬_대보름달집.pptx
+++ b/public/fun/pack/pptx/news/카드뉴스_44_감사·칭찬_대보름달집.pptx
@@ -3287,6 +3287,14 @@
 <file path=ppt/slides/slide1.xml><?xml version="1.0" encoding="utf-8"?>
 <p:sld xmlns:a="http://schemas.openxmlformats.org/drawingml/2006/main" xmlns:p="http://schemas.openxmlformats.org/presentationml/2006/main" xmlns:r="http://schemas.openxmlformats.org/officeDocument/2006/relationships">
   <p:cSld>
+    <p:bg>
+      <p:bgPr>
+        <a:solidFill>
+          <a:srgbClr val="F6EDD5"/>
+        </a:solidFill>
+        <a:effectLst/>
+      </p:bgPr>
+    </p:bg>
     <p:spTree>
       <p:nvGrpSpPr>
         <p:cNvPr id="1" name=""/>
@@ -3294,30 +3302,102 @@
         <p:nvPr/>
       </p:nvGrpSpPr>
       <p:grpSpPr/>
-      <p:pic>
-        <p:nvPicPr>
-          <p:cNvPr id="3" name="표지 그림" descr="news-44.jpg"/>
-          <p:cNvPicPr>
-            <a:picLocks noChangeAspect="1"/>
-          </p:cNvPicPr>
+      <p:sp>
+        <p:nvSpPr>
+          <p:cNvPr id="3" name="장식"/>
+          <p:cNvSpPr/>
           <p:nvPr/>
-        </p:nvPicPr>
-        <p:blipFill>
-          <a:blip r:embed="rId2"/>
-          <a:stretch>
-            <a:fillRect/>
-          </a:stretch>
-        </p:blipFill>
-        <p:spPr>
-          <a:xfrm>
-            <a:off x="0" y="0"/>
-            <a:ext cx="6858000" cy="6858000"/>
+        </p:nvSpPr>
+        <p:spPr>
+          <a:xfrm>
+            <a:off x="1600200" y="822960"/>
+            <a:ext cx="3657600" cy="3657600"/>
+          </a:xfrm>
+          <a:prstGeom prst="ellipse">
+            <a:avLst/>
+          </a:prstGeom>
+          <a:solidFill>
+            <a:srgbClr val="FFFFFF"/>
+          </a:solidFill>
+          <a:ln>
+            <a:noFill/>
+          </a:ln>
+        </p:spPr>
+        <p:txBody>
+          <a:bodyPr rtlCol="0" anchor="ctr"/>
+          <a:lstStyle/>
+          <a:p>
+            <a:pPr algn="ctr"/>
+          </a:p>
+        </p:txBody>
+      </p:sp>
+      <p:sp>
+        <p:nvSpPr>
+          <p:cNvPr id="4" name="장식"/>
+          <p:cNvSpPr/>
+          <p:nvPr/>
+        </p:nvSpPr>
+        <p:spPr>
+          <a:xfrm>
+            <a:off x="3246120" y="502920"/>
+            <a:ext cx="822960" cy="822960"/>
+          </a:xfrm>
+          <a:prstGeom prst="ellipse">
+            <a:avLst/>
+          </a:prstGeom>
+          <a:solidFill>
+            <a:srgbClr val="EBDAAD"/>
+          </a:solidFill>
+          <a:ln>
+            <a:noFill/>
+          </a:ln>
+        </p:spPr>
+        <p:txBody>
+          <a:bodyPr rtlCol="0" anchor="ctr"/>
+          <a:lstStyle/>
+          <a:p>
+            <a:pPr algn="ctr"/>
+          </a:p>
+        </p:txBody>
+      </p:sp>
+      <p:sp>
+        <p:nvSpPr>
+          <p:cNvPr id="5" name="라벨"/>
+          <p:cNvSpPr txBox="1"/>
+          <p:nvPr/>
+        </p:nvSpPr>
+        <p:spPr>
+          <a:xfrm>
+            <a:off x="731520" y="4572000"/>
+            <a:ext cx="5394960" cy="274320"/>
           </a:xfrm>
           <a:prstGeom prst="rect">
             <a:avLst/>
           </a:prstGeom>
-        </p:spPr>
-      </p:pic>
+          <a:noFill/>
+        </p:spPr>
+        <p:txBody>
+          <a:bodyPr wrap="square" lIns="54864" rIns="54864" tIns="27432" bIns="27432" anchor="t">
+            <a:noAutofit/>
+          </a:bodyPr>
+          <a:lstStyle/>
+          <a:p>
+            <a:pPr algn="ctr">
+              <a:lnSpc>
+                <a:spcPct val="115000"/>
+              </a:lnSpc>
+            </a:pPr>
+            <a:r>
+              <a:rPr sz="1000" b="1" i="0" spc="250">
+                <a:solidFill>
+                  <a:srgbClr val="26231F"/>
+                </a:solidFill>
+              </a:rPr>
+              <a:t>CARD NEWS</a:t>
+            </a:r>
+          </a:p>
+        </p:txBody>
+      </p:sp>
       <p:sp>
         <p:nvSpPr>
           <p:cNvPr id="2" name="Title 1"/>
@@ -3330,8 +3410,8 @@
         </p:nvSpPr>
         <p:spPr>
           <a:xfrm>
-            <a:off x="685800" y="960120"/>
-            <a:ext cx="5486400" cy="1463040"/>
+            <a:off x="731520" y="4892040"/>
+            <a:ext cx="5394960" cy="914400"/>
           </a:xfrm>
         </p:spPr>
         <p:txBody>
@@ -3340,7 +3420,7 @@
           </a:bodyPr>
           <a:lstStyle/>
           <a:p>
-            <a:pPr algn="l">
+            <a:pPr algn="ctr">
               <a:lnSpc>
                 <a:spcPct val="105000"/>
               </a:lnSpc>
@@ -3348,24 +3428,24 @@
             <a:r>
               <a:rPr sz="3000" b="1" i="0">
                 <a:solidFill>
-                  <a:srgbClr val="6E4C1C"/>
+                  <a:srgbClr val="26231F"/>
                 </a:solidFill>
               </a:rPr>
-              <a:t>올해 고마웠던 사람 떠올려 보기</a:t>
-            </a:r>
-          </a:p>
-        </p:txBody>
-      </p:sp>
-      <p:sp>
-        <p:nvSpPr>
-          <p:cNvPr id="4" name="한 줄 문구"/>
+              <a:t>고마웠던 사람 떠올려 보기</a:t>
+            </a:r>
+          </a:p>
+        </p:txBody>
+      </p:sp>
+      <p:sp>
+        <p:nvSpPr>
+          <p:cNvPr id="6" name="한 줄 문구"/>
           <p:cNvSpPr txBox="1"/>
           <p:nvPr/>
         </p:nvSpPr>
         <p:spPr>
           <a:xfrm>
-            <a:off x="685800" y="2560320"/>
-            <a:ext cx="5486400" cy="822960"/>
+            <a:off x="731520" y="5806440"/>
+            <a:ext cx="5394960" cy="822960"/>
           </a:xfrm>
           <a:prstGeom prst="rect">
             <a:avLst/>
@@ -3378,15 +3458,15 @@
           </a:bodyPr>
           <a:lstStyle/>
           <a:p>
-            <a:pPr algn="l">
+            <a:pPr algn="ctr">
               <a:lnSpc>
                 <a:spcPct val="115000"/>
               </a:lnSpc>
             </a:pPr>
             <a:r>
-              <a:rPr sz="1500" b="0" i="1">
+              <a:rPr sz="1500" b="0" i="0">
                 <a:solidFill>
-                  <a:srgbClr val="6E4C1C"/>
+                  <a:srgbClr val="26231F"/>
                 </a:solidFill>
               </a:rPr>
               <a:t>옆으로 넘겨 보세요 →</a:t>
@@ -3396,14 +3476,14 @@
       </p:sp>
       <p:sp>
         <p:nvSpPr>
-          <p:cNvPr id="5" name="안내 문구"/>
+          <p:cNvPr id="7" name="안내 문구"/>
           <p:cNvSpPr txBox="1"/>
           <p:nvPr/>
         </p:nvSpPr>
         <p:spPr>
           <a:xfrm>
-            <a:off x="685800" y="3429000"/>
-            <a:ext cx="5486400" cy="914400"/>
+            <a:off x="731520" y="6675120"/>
+            <a:ext cx="5394960" cy="914400"/>
           </a:xfrm>
           <a:prstGeom prst="rect">
             <a:avLst/>
@@ -3416,7 +3496,7 @@
           </a:bodyPr>
           <a:lstStyle/>
           <a:p>
-            <a:pPr algn="l">
+            <a:pPr algn="ctr">
               <a:lnSpc>
                 <a:spcPct val="115000"/>
               </a:lnSpc>
@@ -3424,7 +3504,7 @@
             <a:r>
               <a:rPr sz="1200" b="0" i="0">
                 <a:solidFill>
-                  <a:srgbClr val="666666"/>
+                  <a:srgbClr val="26231F"/>
                 </a:solidFill>
               </a:rPr>
               <a:t>감사·칭찬 · 카드뉴스</a:t>
@@ -3446,7 +3526,7 @@
     <p:bg>
       <p:bgPr>
         <a:solidFill>
-          <a:srgbClr val="FEFBF6"/>
+          <a:srgbClr val="FFFFFF"/>
         </a:solidFill>
         <a:effectLst/>
       </p:bgPr>
@@ -3465,18 +3545,15 @@
           <p:nvPr/>
         </p:nvSpPr>
         <p:spPr>
-          <a:xfrm rot="10800000">
-            <a:off x="5303520" y="0"/>
-            <a:ext cx="914400" cy="1554480"/>
-          </a:xfrm>
-          <a:prstGeom prst="round2SameRect">
-            <a:avLst>
-              <a:gd name="adj1" fmla="val 50000"/>
-              <a:gd name="adj2" fmla="val 0"/>
-            </a:avLst>
+          <a:xfrm>
+            <a:off x="0" y="6565392"/>
+            <a:ext cx="6858000" cy="292608"/>
+          </a:xfrm>
+          <a:prstGeom prst="rect">
+            <a:avLst/>
           </a:prstGeom>
           <a:solidFill>
-            <a:srgbClr val="FDF0DD"/>
+            <a:srgbClr val="EBDAAD"/>
           </a:solidFill>
           <a:ln>
             <a:noFill/>
@@ -3492,52 +3569,72 @@
       </p:sp>
       <p:sp>
         <p:nvSpPr>
-          <p:cNvPr id="2" name="Title 1"/>
-          <p:cNvSpPr>
-            <a:spLocks noGrp="1"/>
-          </p:cNvSpPr>
-          <p:nvPr>
-            <p:ph type="title"/>
-          </p:nvPr>
-        </p:nvSpPr>
-        <p:spPr>
-          <a:xfrm>
-            <a:off x="640080" y="457200"/>
-            <a:ext cx="4389120" cy="868680"/>
-          </a:xfrm>
-        </p:spPr>
-        <p:txBody>
-          <a:bodyPr wrap="square" lIns="54864" rIns="54864" tIns="27432" bIns="27432" anchor="ctr">
-            <a:noAutofit/>
-          </a:bodyPr>
-          <a:lstStyle/>
-          <a:p>
-            <a:pPr algn="l">
-              <a:lnSpc>
-                <a:spcPct val="105000"/>
-              </a:lnSpc>
-            </a:pPr>
-            <a:r>
-              <a:rPr sz="2600" b="1" i="0">
-                <a:solidFill>
-                  <a:srgbClr val="6E4C1C"/>
-                </a:solidFill>
-              </a:rPr>
-              <a:t>고맙다는 말 먼저 건네기</a:t>
-            </a:r>
-          </a:p>
-        </p:txBody>
-      </p:sp>
-      <p:sp>
-        <p:nvSpPr>
-          <p:cNvPr id="4" name="번호"/>
+          <p:cNvPr id="4" name="포인트"/>
+          <p:cNvSpPr/>
+          <p:nvPr/>
+        </p:nvSpPr>
+        <p:spPr>
+          <a:xfrm>
+            <a:off x="3291840" y="246888"/>
+            <a:ext cx="274320" cy="274320"/>
+          </a:xfrm>
+          <a:prstGeom prst="ellipse">
+            <a:avLst/>
+          </a:prstGeom>
+          <a:solidFill>
+            <a:srgbClr val="E1CE98"/>
+          </a:solidFill>
+          <a:ln>
+            <a:noFill/>
+          </a:ln>
+        </p:spPr>
+        <p:txBody>
+          <a:bodyPr rtlCol="0" anchor="ctr"/>
+          <a:lstStyle/>
+          <a:p>
+            <a:pPr algn="ctr"/>
+          </a:p>
+        </p:txBody>
+      </p:sp>
+      <p:sp>
+        <p:nvSpPr>
+          <p:cNvPr id="5" name="장식"/>
+          <p:cNvSpPr/>
+          <p:nvPr/>
+        </p:nvSpPr>
+        <p:spPr>
+          <a:xfrm>
+            <a:off x="3017520" y="1572768"/>
+            <a:ext cx="822960" cy="22860"/>
+          </a:xfrm>
+          <a:prstGeom prst="rect">
+            <a:avLst/>
+          </a:prstGeom>
+          <a:solidFill>
+            <a:srgbClr val="E1CE98"/>
+          </a:solidFill>
+          <a:ln>
+            <a:noFill/>
+          </a:ln>
+        </p:spPr>
+        <p:txBody>
+          <a:bodyPr rtlCol="0" anchor="ctr"/>
+          <a:lstStyle/>
+          <a:p>
+            <a:pPr algn="ctr"/>
+          </a:p>
+        </p:txBody>
+      </p:sp>
+      <p:sp>
+        <p:nvSpPr>
+          <p:cNvPr id="6" name="상단 라벨"/>
           <p:cNvSpPr txBox="1"/>
           <p:nvPr/>
         </p:nvSpPr>
         <p:spPr>
           <a:xfrm>
-            <a:off x="640080" y="1691640"/>
-            <a:ext cx="2194560" cy="1280160"/>
+            <a:off x="640080" y="182880"/>
+            <a:ext cx="3657600" cy="274320"/>
           </a:xfrm>
           <a:prstGeom prst="rect">
             <a:avLst/>
@@ -3545,7 +3642,7 @@
           <a:noFill/>
         </p:spPr>
         <p:txBody>
-          <a:bodyPr wrap="square" lIns="54864" rIns="54864" tIns="27432" bIns="27432" anchor="t">
+          <a:bodyPr wrap="square" lIns="54864" rIns="54864" tIns="27432" bIns="27432" anchor="ctr">
             <a:noAutofit/>
           </a:bodyPr>
           <a:lstStyle/>
@@ -3556,9 +3653,85 @@
               </a:lnSpc>
             </a:pPr>
             <a:r>
+              <a:rPr sz="800" b="1" i="0" spc="250">
+                <a:solidFill>
+                  <a:srgbClr val="8E8780"/>
+                </a:solidFill>
+              </a:rPr>
+              <a:t>CARD NEWS</a:t>
+            </a:r>
+          </a:p>
+        </p:txBody>
+      </p:sp>
+      <p:sp>
+        <p:nvSpPr>
+          <p:cNvPr id="2" name="Title 1"/>
+          <p:cNvSpPr>
+            <a:spLocks noGrp="1"/>
+          </p:cNvSpPr>
+          <p:nvPr>
+            <p:ph type="title"/>
+          </p:nvPr>
+        </p:nvSpPr>
+        <p:spPr>
+          <a:xfrm>
+            <a:off x="1371600" y="640080"/>
+            <a:ext cx="4114800" cy="868680"/>
+          </a:xfrm>
+        </p:spPr>
+        <p:txBody>
+          <a:bodyPr wrap="square" lIns="54864" rIns="54864" tIns="27432" bIns="27432" anchor="ctr">
+            <a:noAutofit/>
+          </a:bodyPr>
+          <a:lstStyle/>
+          <a:p>
+            <a:pPr algn="ctr">
+              <a:lnSpc>
+                <a:spcPct val="105000"/>
+              </a:lnSpc>
+            </a:pPr>
+            <a:r>
+              <a:rPr sz="2600" b="1" i="0">
+                <a:solidFill>
+                  <a:srgbClr val="26231F"/>
+                </a:solidFill>
+              </a:rPr>
+              <a:t>고맙다는 말 먼저 건네기</a:t>
+            </a:r>
+          </a:p>
+        </p:txBody>
+      </p:sp>
+      <p:sp>
+        <p:nvSpPr>
+          <p:cNvPr id="7" name="번호"/>
+          <p:cNvSpPr txBox="1"/>
+          <p:nvPr/>
+        </p:nvSpPr>
+        <p:spPr>
+          <a:xfrm>
+            <a:off x="640080" y="1874519"/>
+            <a:ext cx="2194560" cy="1280160"/>
+          </a:xfrm>
+          <a:prstGeom prst="rect">
+            <a:avLst/>
+          </a:prstGeom>
+          <a:noFill/>
+        </p:spPr>
+        <p:txBody>
+          <a:bodyPr wrap="square" lIns="54864" rIns="54864" tIns="27432" bIns="27432" anchor="t">
+            <a:noAutofit/>
+          </a:bodyPr>
+          <a:lstStyle/>
+          <a:p>
+            <a:pPr algn="l">
+              <a:lnSpc>
+                <a:spcPct val="115000"/>
+              </a:lnSpc>
+            </a:pPr>
+            <a:r>
               <a:rPr sz="6600" b="1" i="0">
                 <a:solidFill>
-                  <a:srgbClr val="ECA33C"/>
+                  <a:srgbClr val="E1CE98"/>
                 </a:solidFill>
               </a:rPr>
               <a:t>01</a:t>
@@ -3568,13 +3741,13 @@
       </p:sp>
       <p:sp>
         <p:nvSpPr>
-          <p:cNvPr id="5" name="본문"/>
+          <p:cNvPr id="8" name="본문"/>
           <p:cNvSpPr txBox="1"/>
           <p:nvPr/>
         </p:nvSpPr>
         <p:spPr>
           <a:xfrm>
-            <a:off x="640080" y="3154680"/>
+            <a:off x="640080" y="3337560"/>
             <a:ext cx="5577840" cy="2651760"/>
           </a:xfrm>
           <a:prstGeom prst="rect">
@@ -3596,7 +3769,7 @@
             <a:r>
               <a:rPr sz="2800" b="0" i="0">
                 <a:solidFill>
-                  <a:srgbClr val="2B2B2B"/>
+                  <a:srgbClr val="26231F"/>
                 </a:solidFill>
               </a:rPr>
               <a:t>작은 일에도 ‘고마워요’를 먼저 말해 보세요.</a:t>
@@ -3606,13 +3779,13 @@
       </p:sp>
       <p:sp>
         <p:nvSpPr>
-          <p:cNvPr id="6" name="쪽 번호"/>
+          <p:cNvPr id="9" name="쪽 번호"/>
           <p:cNvSpPr txBox="1"/>
           <p:nvPr/>
         </p:nvSpPr>
         <p:spPr>
           <a:xfrm>
-            <a:off x="640080" y="6035040"/>
+            <a:off x="640080" y="5806440"/>
             <a:ext cx="5577840" cy="365760"/>
           </a:xfrm>
           <a:prstGeom prst="rect">
@@ -3656,7 +3829,7 @@
     <p:bg>
       <p:bgPr>
         <a:solidFill>
-          <a:srgbClr val="FEFBF6"/>
+          <a:srgbClr val="FFFFFF"/>
         </a:solidFill>
         <a:effectLst/>
       </p:bgPr>
@@ -3675,18 +3848,15 @@
           <p:nvPr/>
         </p:nvSpPr>
         <p:spPr>
-          <a:xfrm rot="10800000">
-            <a:off x="5303520" y="0"/>
-            <a:ext cx="914400" cy="1554480"/>
-          </a:xfrm>
-          <a:prstGeom prst="round2SameRect">
-            <a:avLst>
-              <a:gd name="adj1" fmla="val 50000"/>
-              <a:gd name="adj2" fmla="val 0"/>
-            </a:avLst>
+          <a:xfrm>
+            <a:off x="0" y="6565392"/>
+            <a:ext cx="6858000" cy="292608"/>
+          </a:xfrm>
+          <a:prstGeom prst="rect">
+            <a:avLst/>
           </a:prstGeom>
           <a:solidFill>
-            <a:srgbClr val="FDF0DD"/>
+            <a:srgbClr val="EBDAAD"/>
           </a:solidFill>
           <a:ln>
             <a:noFill/>
@@ -3702,52 +3872,72 @@
       </p:sp>
       <p:sp>
         <p:nvSpPr>
-          <p:cNvPr id="2" name="Title 1"/>
-          <p:cNvSpPr>
-            <a:spLocks noGrp="1"/>
-          </p:cNvSpPr>
-          <p:nvPr>
-            <p:ph type="title"/>
-          </p:nvPr>
-        </p:nvSpPr>
-        <p:spPr>
-          <a:xfrm>
-            <a:off x="640080" y="457200"/>
-            <a:ext cx="4389120" cy="868680"/>
-          </a:xfrm>
-        </p:spPr>
-        <p:txBody>
-          <a:bodyPr wrap="square" lIns="54864" rIns="54864" tIns="27432" bIns="27432" anchor="ctr">
-            <a:noAutofit/>
-          </a:bodyPr>
-          <a:lstStyle/>
-          <a:p>
-            <a:pPr algn="l">
-              <a:lnSpc>
-                <a:spcPct val="105000"/>
-              </a:lnSpc>
-            </a:pPr>
-            <a:r>
-              <a:rPr sz="2600" b="1" i="0">
-                <a:solidFill>
-                  <a:srgbClr val="6E4C1C"/>
-                </a:solidFill>
-              </a:rPr>
-              <a:t>칭찬 한 줄 적어 주기</a:t>
-            </a:r>
-          </a:p>
-        </p:txBody>
-      </p:sp>
-      <p:sp>
-        <p:nvSpPr>
-          <p:cNvPr id="4" name="번호"/>
+          <p:cNvPr id="4" name="포인트"/>
+          <p:cNvSpPr/>
+          <p:nvPr/>
+        </p:nvSpPr>
+        <p:spPr>
+          <a:xfrm>
+            <a:off x="3291840" y="246888"/>
+            <a:ext cx="274320" cy="274320"/>
+          </a:xfrm>
+          <a:prstGeom prst="ellipse">
+            <a:avLst/>
+          </a:prstGeom>
+          <a:solidFill>
+            <a:srgbClr val="E1CE98"/>
+          </a:solidFill>
+          <a:ln>
+            <a:noFill/>
+          </a:ln>
+        </p:spPr>
+        <p:txBody>
+          <a:bodyPr rtlCol="0" anchor="ctr"/>
+          <a:lstStyle/>
+          <a:p>
+            <a:pPr algn="ctr"/>
+          </a:p>
+        </p:txBody>
+      </p:sp>
+      <p:sp>
+        <p:nvSpPr>
+          <p:cNvPr id="5" name="장식"/>
+          <p:cNvSpPr/>
+          <p:nvPr/>
+        </p:nvSpPr>
+        <p:spPr>
+          <a:xfrm>
+            <a:off x="3017520" y="1572768"/>
+            <a:ext cx="822960" cy="22860"/>
+          </a:xfrm>
+          <a:prstGeom prst="rect">
+            <a:avLst/>
+          </a:prstGeom>
+          <a:solidFill>
+            <a:srgbClr val="E1CE98"/>
+          </a:solidFill>
+          <a:ln>
+            <a:noFill/>
+          </a:ln>
+        </p:spPr>
+        <p:txBody>
+          <a:bodyPr rtlCol="0" anchor="ctr"/>
+          <a:lstStyle/>
+          <a:p>
+            <a:pPr algn="ctr"/>
+          </a:p>
+        </p:txBody>
+      </p:sp>
+      <p:sp>
+        <p:nvSpPr>
+          <p:cNvPr id="6" name="상단 라벨"/>
           <p:cNvSpPr txBox="1"/>
           <p:nvPr/>
         </p:nvSpPr>
         <p:spPr>
           <a:xfrm>
-            <a:off x="640080" y="1691640"/>
-            <a:ext cx="2194560" cy="1280160"/>
+            <a:off x="640080" y="182880"/>
+            <a:ext cx="3657600" cy="274320"/>
           </a:xfrm>
           <a:prstGeom prst="rect">
             <a:avLst/>
@@ -3755,7 +3945,7 @@
           <a:noFill/>
         </p:spPr>
         <p:txBody>
-          <a:bodyPr wrap="square" lIns="54864" rIns="54864" tIns="27432" bIns="27432" anchor="t">
+          <a:bodyPr wrap="square" lIns="54864" rIns="54864" tIns="27432" bIns="27432" anchor="ctr">
             <a:noAutofit/>
           </a:bodyPr>
           <a:lstStyle/>
@@ -3766,9 +3956,85 @@
               </a:lnSpc>
             </a:pPr>
             <a:r>
+              <a:rPr sz="800" b="1" i="0" spc="250">
+                <a:solidFill>
+                  <a:srgbClr val="8E8780"/>
+                </a:solidFill>
+              </a:rPr>
+              <a:t>CARD NEWS</a:t>
+            </a:r>
+          </a:p>
+        </p:txBody>
+      </p:sp>
+      <p:sp>
+        <p:nvSpPr>
+          <p:cNvPr id="2" name="Title 1"/>
+          <p:cNvSpPr>
+            <a:spLocks noGrp="1"/>
+          </p:cNvSpPr>
+          <p:nvPr>
+            <p:ph type="title"/>
+          </p:nvPr>
+        </p:nvSpPr>
+        <p:spPr>
+          <a:xfrm>
+            <a:off x="1371600" y="640080"/>
+            <a:ext cx="4114800" cy="868680"/>
+          </a:xfrm>
+        </p:spPr>
+        <p:txBody>
+          <a:bodyPr wrap="square" lIns="54864" rIns="54864" tIns="27432" bIns="27432" anchor="ctr">
+            <a:noAutofit/>
+          </a:bodyPr>
+          <a:lstStyle/>
+          <a:p>
+            <a:pPr algn="ctr">
+              <a:lnSpc>
+                <a:spcPct val="105000"/>
+              </a:lnSpc>
+            </a:pPr>
+            <a:r>
+              <a:rPr sz="2600" b="1" i="0">
+                <a:solidFill>
+                  <a:srgbClr val="26231F"/>
+                </a:solidFill>
+              </a:rPr>
+              <a:t>칭찬 한 줄 적어 주기</a:t>
+            </a:r>
+          </a:p>
+        </p:txBody>
+      </p:sp>
+      <p:sp>
+        <p:nvSpPr>
+          <p:cNvPr id="7" name="번호"/>
+          <p:cNvSpPr txBox="1"/>
+          <p:nvPr/>
+        </p:nvSpPr>
+        <p:spPr>
+          <a:xfrm>
+            <a:off x="640080" y="1874519"/>
+            <a:ext cx="2194560" cy="1280160"/>
+          </a:xfrm>
+          <a:prstGeom prst="rect">
+            <a:avLst/>
+          </a:prstGeom>
+          <a:noFill/>
+        </p:spPr>
+        <p:txBody>
+          <a:bodyPr wrap="square" lIns="54864" rIns="54864" tIns="27432" bIns="27432" anchor="t">
+            <a:noAutofit/>
+          </a:bodyPr>
+          <a:lstStyle/>
+          <a:p>
+            <a:pPr algn="l">
+              <a:lnSpc>
+                <a:spcPct val="115000"/>
+              </a:lnSpc>
+            </a:pPr>
+            <a:r>
               <a:rPr sz="6600" b="1" i="0">
                 <a:solidFill>
-                  <a:srgbClr val="ECA33C"/>
+                  <a:srgbClr val="E1CE98"/>
                 </a:solidFill>
               </a:rPr>
               <a:t>02</a:t>
@@ -3778,13 +4044,13 @@
       </p:sp>
       <p:sp>
         <p:nvSpPr>
-          <p:cNvPr id="5" name="본문"/>
+          <p:cNvPr id="8" name="본문"/>
           <p:cNvSpPr txBox="1"/>
           <p:nvPr/>
         </p:nvSpPr>
         <p:spPr>
           <a:xfrm>
-            <a:off x="640080" y="3154680"/>
+            <a:off x="640080" y="3337560"/>
             <a:ext cx="5577840" cy="2651760"/>
           </a:xfrm>
           <a:prstGeom prst="rect">
@@ -3806,7 +4072,7 @@
             <a:r>
               <a:rPr sz="2800" b="0" i="0">
                 <a:solidFill>
-                  <a:srgbClr val="2B2B2B"/>
+                  <a:srgbClr val="26231F"/>
                 </a:solidFill>
               </a:rPr>
               <a:t>메모지에 칭찬 한 줄을 적어 가족 책상에 붙여 보세요.</a:t>
@@ -3816,13 +4082,13 @@
       </p:sp>
       <p:sp>
         <p:nvSpPr>
-          <p:cNvPr id="6" name="쪽 번호"/>
+          <p:cNvPr id="9" name="쪽 번호"/>
           <p:cNvSpPr txBox="1"/>
           <p:nvPr/>
         </p:nvSpPr>
         <p:spPr>
           <a:xfrm>
-            <a:off x="640080" y="6035040"/>
+            <a:off x="640080" y="5806440"/>
             <a:ext cx="5577840" cy="365760"/>
           </a:xfrm>
           <a:prstGeom prst="rect">
@@ -3866,7 +4132,7 @@
     <p:bg>
       <p:bgPr>
         <a:solidFill>
-          <a:srgbClr val="FEFBF6"/>
+          <a:srgbClr val="FFFFFF"/>
         </a:solidFill>
         <a:effectLst/>
       </p:bgPr>
@@ -3885,18 +4151,15 @@
           <p:nvPr/>
         </p:nvSpPr>
         <p:spPr>
-          <a:xfrm rot="10800000">
-            <a:off x="5303520" y="0"/>
-            <a:ext cx="914400" cy="1554480"/>
-          </a:xfrm>
-          <a:prstGeom prst="round2SameRect">
-            <a:avLst>
-              <a:gd name="adj1" fmla="val 50000"/>
-              <a:gd name="adj2" fmla="val 0"/>
-            </a:avLst>
+          <a:xfrm>
+            <a:off x="0" y="6565392"/>
+            <a:ext cx="6858000" cy="292608"/>
+          </a:xfrm>
+          <a:prstGeom prst="rect">
+            <a:avLst/>
           </a:prstGeom>
           <a:solidFill>
-            <a:srgbClr val="FDF0DD"/>
+            <a:srgbClr val="EBDAAD"/>
           </a:solidFill>
           <a:ln>
             <a:noFill/>
@@ -3912,52 +4175,72 @@
       </p:sp>
       <p:sp>
         <p:nvSpPr>
-          <p:cNvPr id="2" name="Title 1"/>
-          <p:cNvSpPr>
-            <a:spLocks noGrp="1"/>
-          </p:cNvSpPr>
-          <p:nvPr>
-            <p:ph type="title"/>
-          </p:nvPr>
-        </p:nvSpPr>
-        <p:spPr>
-          <a:xfrm>
-            <a:off x="640080" y="457200"/>
-            <a:ext cx="4389120" cy="868680"/>
-          </a:xfrm>
-        </p:spPr>
-        <p:txBody>
-          <a:bodyPr wrap="square" lIns="54864" rIns="54864" tIns="27432" bIns="27432" anchor="ctr">
-            <a:noAutofit/>
-          </a:bodyPr>
-          <a:lstStyle/>
-          <a:p>
-            <a:pPr algn="l">
-              <a:lnSpc>
-                <a:spcPct val="105000"/>
-              </a:lnSpc>
-            </a:pPr>
-            <a:r>
-              <a:rPr sz="2600" b="1" i="0">
-                <a:solidFill>
-                  <a:srgbClr val="6E4C1C"/>
-                </a:solidFill>
-              </a:rPr>
-              <a:t>퇴근한 사람에게 한마디</a:t>
-            </a:r>
-          </a:p>
-        </p:txBody>
-      </p:sp>
-      <p:sp>
-        <p:nvSpPr>
-          <p:cNvPr id="4" name="번호"/>
+          <p:cNvPr id="4" name="포인트"/>
+          <p:cNvSpPr/>
+          <p:nvPr/>
+        </p:nvSpPr>
+        <p:spPr>
+          <a:xfrm>
+            <a:off x="3291840" y="246888"/>
+            <a:ext cx="274320" cy="274320"/>
+          </a:xfrm>
+          <a:prstGeom prst="ellipse">
+            <a:avLst/>
+          </a:prstGeom>
+          <a:solidFill>
+            <a:srgbClr val="E1CE98"/>
+          </a:solidFill>
+          <a:ln>
+            <a:noFill/>
+          </a:ln>
+        </p:spPr>
+        <p:txBody>
+          <a:bodyPr rtlCol="0" anchor="ctr"/>
+          <a:lstStyle/>
+          <a:p>
+            <a:pPr algn="ctr"/>
+          </a:p>
+        </p:txBody>
+      </p:sp>
+      <p:sp>
+        <p:nvSpPr>
+          <p:cNvPr id="5" name="장식"/>
+          <p:cNvSpPr/>
+          <p:nvPr/>
+        </p:nvSpPr>
+        <p:spPr>
+          <a:xfrm>
+            <a:off x="3017520" y="1572768"/>
+            <a:ext cx="822960" cy="22860"/>
+          </a:xfrm>
+          <a:prstGeom prst="rect">
+            <a:avLst/>
+          </a:prstGeom>
+          <a:solidFill>
+            <a:srgbClr val="E1CE98"/>
+          </a:solidFill>
+          <a:ln>
+            <a:noFill/>
+          </a:ln>
+        </p:spPr>
+        <p:txBody>
+          <a:bodyPr rtlCol="0" anchor="ctr"/>
+          <a:lstStyle/>
+          <a:p>
+            <a:pPr algn="ctr"/>
+          </a:p>
+        </p:txBody>
+      </p:sp>
+      <p:sp>
+        <p:nvSpPr>
+          <p:cNvPr id="6" name="상단 라벨"/>
           <p:cNvSpPr txBox="1"/>
           <p:nvPr/>
         </p:nvSpPr>
         <p:spPr>
           <a:xfrm>
-            <a:off x="640080" y="1691640"/>
-            <a:ext cx="2194560" cy="1280160"/>
+            <a:off x="640080" y="182880"/>
+            <a:ext cx="3657600" cy="274320"/>
           </a:xfrm>
           <a:prstGeom prst="rect">
             <a:avLst/>
@@ -3965,7 +4248,7 @@
           <a:noFill/>
         </p:spPr>
         <p:txBody>
-          <a:bodyPr wrap="square" lIns="54864" rIns="54864" tIns="27432" bIns="27432" anchor="t">
+          <a:bodyPr wrap="square" lIns="54864" rIns="54864" tIns="27432" bIns="27432" anchor="ctr">
             <a:noAutofit/>
           </a:bodyPr>
           <a:lstStyle/>
@@ -3976,9 +4259,85 @@
               </a:lnSpc>
             </a:pPr>
             <a:r>
+              <a:rPr sz="800" b="1" i="0" spc="250">
+                <a:solidFill>
+                  <a:srgbClr val="8E8780"/>
+                </a:solidFill>
+              </a:rPr>
+              <a:t>CARD NEWS</a:t>
+            </a:r>
+          </a:p>
+        </p:txBody>
+      </p:sp>
+      <p:sp>
+        <p:nvSpPr>
+          <p:cNvPr id="2" name="Title 1"/>
+          <p:cNvSpPr>
+            <a:spLocks noGrp="1"/>
+          </p:cNvSpPr>
+          <p:nvPr>
+            <p:ph type="title"/>
+          </p:nvPr>
+        </p:nvSpPr>
+        <p:spPr>
+          <a:xfrm>
+            <a:off x="1371600" y="640080"/>
+            <a:ext cx="4114800" cy="868680"/>
+          </a:xfrm>
+        </p:spPr>
+        <p:txBody>
+          <a:bodyPr wrap="square" lIns="54864" rIns="54864" tIns="27432" bIns="27432" anchor="ctr">
+            <a:noAutofit/>
+          </a:bodyPr>
+          <a:lstStyle/>
+          <a:p>
+            <a:pPr algn="ctr">
+              <a:lnSpc>
+                <a:spcPct val="105000"/>
+              </a:lnSpc>
+            </a:pPr>
+            <a:r>
+              <a:rPr sz="2600" b="1" i="0">
+                <a:solidFill>
+                  <a:srgbClr val="26231F"/>
+                </a:solidFill>
+              </a:rPr>
+              <a:t>퇴근한 사람에게 한마디</a:t>
+            </a:r>
+          </a:p>
+        </p:txBody>
+      </p:sp>
+      <p:sp>
+        <p:nvSpPr>
+          <p:cNvPr id="7" name="번호"/>
+          <p:cNvSpPr txBox="1"/>
+          <p:nvPr/>
+        </p:nvSpPr>
+        <p:spPr>
+          <a:xfrm>
+            <a:off x="640080" y="1874519"/>
+            <a:ext cx="2194560" cy="1280160"/>
+          </a:xfrm>
+          <a:prstGeom prst="rect">
+            <a:avLst/>
+          </a:prstGeom>
+          <a:noFill/>
+        </p:spPr>
+        <p:txBody>
+          <a:bodyPr wrap="square" lIns="54864" rIns="54864" tIns="27432" bIns="27432" anchor="t">
+            <a:noAutofit/>
+          </a:bodyPr>
+          <a:lstStyle/>
+          <a:p>
+            <a:pPr algn="l">
+              <a:lnSpc>
+                <a:spcPct val="115000"/>
+              </a:lnSpc>
+            </a:pPr>
+            <a:r>
               <a:rPr sz="6600" b="1" i="0">
                 <a:solidFill>
-                  <a:srgbClr val="ECA33C"/>
+                  <a:srgbClr val="E1CE98"/>
                 </a:solidFill>
               </a:rPr>
               <a:t>03</a:t>
@@ -3988,13 +4347,13 @@
       </p:sp>
       <p:sp>
         <p:nvSpPr>
-          <p:cNvPr id="5" name="본문"/>
+          <p:cNvPr id="8" name="본문"/>
           <p:cNvSpPr txBox="1"/>
           <p:nvPr/>
         </p:nvSpPr>
         <p:spPr>
           <a:xfrm>
-            <a:off x="640080" y="3154680"/>
+            <a:off x="640080" y="3337560"/>
             <a:ext cx="5577840" cy="2651760"/>
           </a:xfrm>
           <a:prstGeom prst="rect">
@@ -4016,7 +4375,7 @@
             <a:r>
               <a:rPr sz="2800" b="0" i="0">
                 <a:solidFill>
-                  <a:srgbClr val="2B2B2B"/>
+                  <a:srgbClr val="26231F"/>
                 </a:solidFill>
               </a:rPr>
               <a:t>‘오늘도 고생했어’ 한마디면 충분해요.</a:t>
@@ -4026,13 +4385,13 @@
       </p:sp>
       <p:sp>
         <p:nvSpPr>
-          <p:cNvPr id="6" name="쪽 번호"/>
+          <p:cNvPr id="9" name="쪽 번호"/>
           <p:cNvSpPr txBox="1"/>
           <p:nvPr/>
         </p:nvSpPr>
         <p:spPr>
           <a:xfrm>
-            <a:off x="640080" y="6035040"/>
+            <a:off x="640080" y="5806440"/>
             <a:ext cx="5577840" cy="365760"/>
           </a:xfrm>
           <a:prstGeom prst="rect">
@@ -4076,7 +4435,7 @@
     <p:bg>
       <p:bgPr>
         <a:solidFill>
-          <a:srgbClr val="FEFBF6"/>
+          <a:srgbClr val="FFFFFF"/>
         </a:solidFill>
         <a:effectLst/>
       </p:bgPr>
@@ -4095,18 +4454,15 @@
           <p:nvPr/>
         </p:nvSpPr>
         <p:spPr>
-          <a:xfrm rot="10800000">
-            <a:off x="5303520" y="0"/>
-            <a:ext cx="914400" cy="1554480"/>
-          </a:xfrm>
-          <a:prstGeom prst="round2SameRect">
-            <a:avLst>
-              <a:gd name="adj1" fmla="val 50000"/>
-              <a:gd name="adj2" fmla="val 0"/>
-            </a:avLst>
+          <a:xfrm>
+            <a:off x="0" y="6565392"/>
+            <a:ext cx="6858000" cy="292608"/>
+          </a:xfrm>
+          <a:prstGeom prst="rect">
+            <a:avLst/>
           </a:prstGeom>
           <a:solidFill>
-            <a:srgbClr val="FDF0DD"/>
+            <a:srgbClr val="EBDAAD"/>
           </a:solidFill>
           <a:ln>
             <a:noFill/>
@@ -4122,52 +4478,72 @@
       </p:sp>
       <p:sp>
         <p:nvSpPr>
-          <p:cNvPr id="2" name="Title 1"/>
-          <p:cNvSpPr>
-            <a:spLocks noGrp="1"/>
-          </p:cNvSpPr>
-          <p:nvPr>
-            <p:ph type="title"/>
-          </p:nvPr>
-        </p:nvSpPr>
-        <p:spPr>
-          <a:xfrm>
-            <a:off x="640080" y="457200"/>
-            <a:ext cx="4389120" cy="868680"/>
-          </a:xfrm>
-        </p:spPr>
-        <p:txBody>
-          <a:bodyPr wrap="square" lIns="54864" rIns="54864" tIns="27432" bIns="27432" anchor="ctr">
-            <a:noAutofit/>
-          </a:bodyPr>
-          <a:lstStyle/>
-          <a:p>
-            <a:pPr algn="l">
-              <a:lnSpc>
-                <a:spcPct val="105000"/>
-              </a:lnSpc>
-            </a:pPr>
-            <a:r>
-              <a:rPr sz="2600" b="1" i="0">
-                <a:solidFill>
-                  <a:srgbClr val="6E4C1C"/>
-                </a:solidFill>
-              </a:rPr>
-              <a:t>감사 일기 세 줄</a:t>
-            </a:r>
-          </a:p>
-        </p:txBody>
-      </p:sp>
-      <p:sp>
-        <p:nvSpPr>
-          <p:cNvPr id="4" name="번호"/>
+          <p:cNvPr id="4" name="포인트"/>
+          <p:cNvSpPr/>
+          <p:nvPr/>
+        </p:nvSpPr>
+        <p:spPr>
+          <a:xfrm>
+            <a:off x="3291840" y="246888"/>
+            <a:ext cx="274320" cy="274320"/>
+          </a:xfrm>
+          <a:prstGeom prst="ellipse">
+            <a:avLst/>
+          </a:prstGeom>
+          <a:solidFill>
+            <a:srgbClr val="E1CE98"/>
+          </a:solidFill>
+          <a:ln>
+            <a:noFill/>
+          </a:ln>
+        </p:spPr>
+        <p:txBody>
+          <a:bodyPr rtlCol="0" anchor="ctr"/>
+          <a:lstStyle/>
+          <a:p>
+            <a:pPr algn="ctr"/>
+          </a:p>
+        </p:txBody>
+      </p:sp>
+      <p:sp>
+        <p:nvSpPr>
+          <p:cNvPr id="5" name="장식"/>
+          <p:cNvSpPr/>
+          <p:nvPr/>
+        </p:nvSpPr>
+        <p:spPr>
+          <a:xfrm>
+            <a:off x="3017520" y="1572768"/>
+            <a:ext cx="822960" cy="22860"/>
+          </a:xfrm>
+          <a:prstGeom prst="rect">
+            <a:avLst/>
+          </a:prstGeom>
+          <a:solidFill>
+            <a:srgbClr val="E1CE98"/>
+          </a:solidFill>
+          <a:ln>
+            <a:noFill/>
+          </a:ln>
+        </p:spPr>
+        <p:txBody>
+          <a:bodyPr rtlCol="0" anchor="ctr"/>
+          <a:lstStyle/>
+          <a:p>
+            <a:pPr algn="ctr"/>
+          </a:p>
+        </p:txBody>
+      </p:sp>
+      <p:sp>
+        <p:nvSpPr>
+          <p:cNvPr id="6" name="상단 라벨"/>
           <p:cNvSpPr txBox="1"/>
           <p:nvPr/>
         </p:nvSpPr>
         <p:spPr>
           <a:xfrm>
-            <a:off x="640080" y="1691640"/>
-            <a:ext cx="2194560" cy="1280160"/>
+            <a:off x="640080" y="182880"/>
+            <a:ext cx="3657600" cy="274320"/>
           </a:xfrm>
           <a:prstGeom prst="rect">
             <a:avLst/>
@@ -4175,7 +4551,7 @@
           <a:noFill/>
         </p:spPr>
         <p:txBody>
-          <a:bodyPr wrap="square" lIns="54864" rIns="54864" tIns="27432" bIns="27432" anchor="t">
+          <a:bodyPr wrap="square" lIns="54864" rIns="54864" tIns="27432" bIns="27432" anchor="ctr">
             <a:noAutofit/>
           </a:bodyPr>
           <a:lstStyle/>
@@ -4186,9 +4562,85 @@
               </a:lnSpc>
             </a:pPr>
             <a:r>
+              <a:rPr sz="800" b="1" i="0" spc="250">
+                <a:solidFill>
+                  <a:srgbClr val="8E8780"/>
+                </a:solidFill>
+              </a:rPr>
+              <a:t>CARD NEWS</a:t>
+            </a:r>
+          </a:p>
+        </p:txBody>
+      </p:sp>
+      <p:sp>
+        <p:nvSpPr>
+          <p:cNvPr id="2" name="Title 1"/>
+          <p:cNvSpPr>
+            <a:spLocks noGrp="1"/>
+          </p:cNvSpPr>
+          <p:nvPr>
+            <p:ph type="title"/>
+          </p:nvPr>
+        </p:nvSpPr>
+        <p:spPr>
+          <a:xfrm>
+            <a:off x="1371600" y="640080"/>
+            <a:ext cx="4114800" cy="868680"/>
+          </a:xfrm>
+        </p:spPr>
+        <p:txBody>
+          <a:bodyPr wrap="square" lIns="54864" rIns="54864" tIns="27432" bIns="27432" anchor="ctr">
+            <a:noAutofit/>
+          </a:bodyPr>
+          <a:lstStyle/>
+          <a:p>
+            <a:pPr algn="ctr">
+              <a:lnSpc>
+                <a:spcPct val="105000"/>
+              </a:lnSpc>
+            </a:pPr>
+            <a:r>
+              <a:rPr sz="2600" b="1" i="0">
+                <a:solidFill>
+                  <a:srgbClr val="26231F"/>
+                </a:solidFill>
+              </a:rPr>
+              <a:t>감사 일기 세 줄</a:t>
+            </a:r>
+          </a:p>
+        </p:txBody>
+      </p:sp>
+      <p:sp>
+        <p:nvSpPr>
+          <p:cNvPr id="7" name="번호"/>
+          <p:cNvSpPr txBox="1"/>
+          <p:nvPr/>
+        </p:nvSpPr>
+        <p:spPr>
+          <a:xfrm>
+            <a:off x="640080" y="1874519"/>
+            <a:ext cx="2194560" cy="1280160"/>
+          </a:xfrm>
+          <a:prstGeom prst="rect">
+            <a:avLst/>
+          </a:prstGeom>
+          <a:noFill/>
+        </p:spPr>
+        <p:txBody>
+          <a:bodyPr wrap="square" lIns="54864" rIns="54864" tIns="27432" bIns="27432" anchor="t">
+            <a:noAutofit/>
+          </a:bodyPr>
+          <a:lstStyle/>
+          <a:p>
+            <a:pPr algn="l">
+              <a:lnSpc>
+                <a:spcPct val="115000"/>
+              </a:lnSpc>
+            </a:pPr>
+            <a:r>
               <a:rPr sz="6600" b="1" i="0">
                 <a:solidFill>
-                  <a:srgbClr val="ECA33C"/>
+                  <a:srgbClr val="E1CE98"/>
                 </a:solidFill>
               </a:rPr>
               <a:t>04</a:t>
@@ -4198,13 +4650,13 @@
       </p:sp>
       <p:sp>
         <p:nvSpPr>
-          <p:cNvPr id="5" name="본문"/>
+          <p:cNvPr id="8" name="본문"/>
           <p:cNvSpPr txBox="1"/>
           <p:nvPr/>
         </p:nvSpPr>
         <p:spPr>
           <a:xfrm>
-            <a:off x="640080" y="3154680"/>
+            <a:off x="640080" y="3337560"/>
             <a:ext cx="5577840" cy="2651760"/>
           </a:xfrm>
           <a:prstGeom prst="rect">
@@ -4226,7 +4678,7 @@
             <a:r>
               <a:rPr sz="2800" b="0" i="0">
                 <a:solidFill>
-                  <a:srgbClr val="2B2B2B"/>
+                  <a:srgbClr val="26231F"/>
                 </a:solidFill>
               </a:rPr>
               <a:t>오늘 고마웠던 일 세 가지를 적어 보세요.</a:t>
@@ -4236,13 +4688,13 @@
       </p:sp>
       <p:sp>
         <p:nvSpPr>
-          <p:cNvPr id="6" name="쪽 번호"/>
+          <p:cNvPr id="9" name="쪽 번호"/>
           <p:cNvSpPr txBox="1"/>
           <p:nvPr/>
         </p:nvSpPr>
         <p:spPr>
           <a:xfrm>
-            <a:off x="640080" y="6035040"/>
+            <a:off x="640080" y="5806440"/>
             <a:ext cx="5577840" cy="365760"/>
           </a:xfrm>
           <a:prstGeom prst="rect">
@@ -4286,7 +4738,7 @@
     <p:bg>
       <p:bgPr>
         <a:solidFill>
-          <a:srgbClr val="FEFBF6"/>
+          <a:srgbClr val="FFFFFF"/>
         </a:solidFill>
         <a:effectLst/>
       </p:bgPr>
@@ -4305,18 +4757,15 @@
           <p:nvPr/>
         </p:nvSpPr>
         <p:spPr>
-          <a:xfrm rot="10800000">
-            <a:off x="5303520" y="0"/>
-            <a:ext cx="914400" cy="1554480"/>
-          </a:xfrm>
-          <a:prstGeom prst="round2SameRect">
-            <a:avLst>
-              <a:gd name="adj1" fmla="val 50000"/>
-              <a:gd name="adj2" fmla="val 0"/>
-            </a:avLst>
+          <a:xfrm>
+            <a:off x="0" y="6565392"/>
+            <a:ext cx="6858000" cy="292608"/>
+          </a:xfrm>
+          <a:prstGeom prst="rect">
+            <a:avLst/>
           </a:prstGeom>
           <a:solidFill>
-            <a:srgbClr val="FDF0DD"/>
+            <a:srgbClr val="EBDAAD"/>
           </a:solidFill>
           <a:ln>
             <a:noFill/>
@@ -4332,52 +4781,72 @@
       </p:sp>
       <p:sp>
         <p:nvSpPr>
-          <p:cNvPr id="2" name="Title 1"/>
-          <p:cNvSpPr>
-            <a:spLocks noGrp="1"/>
-          </p:cNvSpPr>
-          <p:nvPr>
-            <p:ph type="title"/>
-          </p:nvPr>
-        </p:nvSpPr>
-        <p:spPr>
-          <a:xfrm>
-            <a:off x="640080" y="457200"/>
-            <a:ext cx="4389120" cy="868680"/>
-          </a:xfrm>
-        </p:spPr>
-        <p:txBody>
-          <a:bodyPr wrap="square" lIns="54864" rIns="54864" tIns="27432" bIns="27432" anchor="ctr">
-            <a:noAutofit/>
-          </a:bodyPr>
-          <a:lstStyle/>
-          <a:p>
-            <a:pPr algn="l">
-              <a:lnSpc>
-                <a:spcPct val="105000"/>
-              </a:lnSpc>
-            </a:pPr>
-            <a:r>
-              <a:rPr sz="2600" b="1" i="0">
-                <a:solidFill>
-                  <a:srgbClr val="6E4C1C"/>
-                </a:solidFill>
-              </a:rPr>
-              <a:t>엽서 한 장 쓰기</a:t>
-            </a:r>
-          </a:p>
-        </p:txBody>
-      </p:sp>
-      <p:sp>
-        <p:nvSpPr>
-          <p:cNvPr id="4" name="번호"/>
+          <p:cNvPr id="4" name="포인트"/>
+          <p:cNvSpPr/>
+          <p:nvPr/>
+        </p:nvSpPr>
+        <p:spPr>
+          <a:xfrm>
+            <a:off x="3291840" y="246888"/>
+            <a:ext cx="274320" cy="274320"/>
+          </a:xfrm>
+          <a:prstGeom prst="ellipse">
+            <a:avLst/>
+          </a:prstGeom>
+          <a:solidFill>
+            <a:srgbClr val="E1CE98"/>
+          </a:solidFill>
+          <a:ln>
+            <a:noFill/>
+          </a:ln>
+        </p:spPr>
+        <p:txBody>
+          <a:bodyPr rtlCol="0" anchor="ctr"/>
+          <a:lstStyle/>
+          <a:p>
+            <a:pPr algn="ctr"/>
+          </a:p>
+        </p:txBody>
+      </p:sp>
+      <p:sp>
+        <p:nvSpPr>
+          <p:cNvPr id="5" name="장식"/>
+          <p:cNvSpPr/>
+          <p:nvPr/>
+        </p:nvSpPr>
+        <p:spPr>
+          <a:xfrm>
+            <a:off x="3017520" y="1572768"/>
+            <a:ext cx="822960" cy="22860"/>
+          </a:xfrm>
+          <a:prstGeom prst="rect">
+            <a:avLst/>
+          </a:prstGeom>
+          <a:solidFill>
+            <a:srgbClr val="E1CE98"/>
+          </a:solidFill>
+          <a:ln>
+            <a:noFill/>
+          </a:ln>
+        </p:spPr>
+        <p:txBody>
+          <a:bodyPr rtlCol="0" anchor="ctr"/>
+          <a:lstStyle/>
+          <a:p>
+            <a:pPr algn="ctr"/>
+          </a:p>
+        </p:txBody>
+      </p:sp>
+      <p:sp>
+        <p:nvSpPr>
+          <p:cNvPr id="6" name="상단 라벨"/>
           <p:cNvSpPr txBox="1"/>
           <p:nvPr/>
         </p:nvSpPr>
         <p:spPr>
           <a:xfrm>
-            <a:off x="640080" y="1691640"/>
-            <a:ext cx="2194560" cy="1280160"/>
+            <a:off x="640080" y="182880"/>
+            <a:ext cx="3657600" cy="274320"/>
           </a:xfrm>
           <a:prstGeom prst="rect">
             <a:avLst/>
@@ -4385,7 +4854,7 @@
           <a:noFill/>
         </p:spPr>
         <p:txBody>
-          <a:bodyPr wrap="square" lIns="54864" rIns="54864" tIns="27432" bIns="27432" anchor="t">
+          <a:bodyPr wrap="square" lIns="54864" rIns="54864" tIns="27432" bIns="27432" anchor="ctr">
             <a:noAutofit/>
           </a:bodyPr>
           <a:lstStyle/>
@@ -4396,9 +4865,85 @@
               </a:lnSpc>
             </a:pPr>
             <a:r>
+              <a:rPr sz="800" b="1" i="0" spc="250">
+                <a:solidFill>
+                  <a:srgbClr val="8E8780"/>
+                </a:solidFill>
+              </a:rPr>
+              <a:t>CARD NEWS</a:t>
+            </a:r>
+          </a:p>
+        </p:txBody>
+      </p:sp>
+      <p:sp>
+        <p:nvSpPr>
+          <p:cNvPr id="2" name="Title 1"/>
+          <p:cNvSpPr>
+            <a:spLocks noGrp="1"/>
+          </p:cNvSpPr>
+          <p:nvPr>
+            <p:ph type="title"/>
+          </p:nvPr>
+        </p:nvSpPr>
+        <p:spPr>
+          <a:xfrm>
+            <a:off x="1371600" y="640080"/>
+            <a:ext cx="4114800" cy="868680"/>
+          </a:xfrm>
+        </p:spPr>
+        <p:txBody>
+          <a:bodyPr wrap="square" lIns="54864" rIns="54864" tIns="27432" bIns="27432" anchor="ctr">
+            <a:noAutofit/>
+          </a:bodyPr>
+          <a:lstStyle/>
+          <a:p>
+            <a:pPr algn="ctr">
+              <a:lnSpc>
+                <a:spcPct val="105000"/>
+              </a:lnSpc>
+            </a:pPr>
+            <a:r>
+              <a:rPr sz="2600" b="1" i="0">
+                <a:solidFill>
+                  <a:srgbClr val="26231F"/>
+                </a:solidFill>
+              </a:rPr>
+              <a:t>엽서 한 장 쓰기</a:t>
+            </a:r>
+          </a:p>
+        </p:txBody>
+      </p:sp>
+      <p:sp>
+        <p:nvSpPr>
+          <p:cNvPr id="7" name="번호"/>
+          <p:cNvSpPr txBox="1"/>
+          <p:nvPr/>
+        </p:nvSpPr>
+        <p:spPr>
+          <a:xfrm>
+            <a:off x="640080" y="1874519"/>
+            <a:ext cx="2194560" cy="1280160"/>
+          </a:xfrm>
+          <a:prstGeom prst="rect">
+            <a:avLst/>
+          </a:prstGeom>
+          <a:noFill/>
+        </p:spPr>
+        <p:txBody>
+          <a:bodyPr wrap="square" lIns="54864" rIns="54864" tIns="27432" bIns="27432" anchor="t">
+            <a:noAutofit/>
+          </a:bodyPr>
+          <a:lstStyle/>
+          <a:p>
+            <a:pPr algn="l">
+              <a:lnSpc>
+                <a:spcPct val="115000"/>
+              </a:lnSpc>
+            </a:pPr>
+            <a:r>
               <a:rPr sz="6600" b="1" i="0">
                 <a:solidFill>
-                  <a:srgbClr val="ECA33C"/>
+                  <a:srgbClr val="E1CE98"/>
                 </a:solidFill>
               </a:rPr>
               <a:t>05</a:t>
@@ -4408,13 +4953,13 @@
       </p:sp>
       <p:sp>
         <p:nvSpPr>
-          <p:cNvPr id="5" name="본문"/>
+          <p:cNvPr id="8" name="본문"/>
           <p:cNvSpPr txBox="1"/>
           <p:nvPr/>
         </p:nvSpPr>
         <p:spPr>
           <a:xfrm>
-            <a:off x="640080" y="3154680"/>
+            <a:off x="640080" y="3337560"/>
             <a:ext cx="5577840" cy="2651760"/>
           </a:xfrm>
           <a:prstGeom prst="rect">
@@ -4436,7 +4981,7 @@
             <a:r>
               <a:rPr sz="2800" b="0" i="0">
                 <a:solidFill>
-                  <a:srgbClr val="2B2B2B"/>
+                  <a:srgbClr val="26231F"/>
                 </a:solidFill>
               </a:rPr>
               <a:t>짧아도 좋아요. 우체통에 넣는 순간 설레요.</a:t>
@@ -4446,13 +4991,13 @@
       </p:sp>
       <p:sp>
         <p:nvSpPr>
-          <p:cNvPr id="6" name="쪽 번호"/>
+          <p:cNvPr id="9" name="쪽 번호"/>
           <p:cNvSpPr txBox="1"/>
           <p:nvPr/>
         </p:nvSpPr>
         <p:spPr>
           <a:xfrm>
-            <a:off x="640080" y="6035040"/>
+            <a:off x="640080" y="5806440"/>
             <a:ext cx="5577840" cy="365760"/>
           </a:xfrm>
           <a:prstGeom prst="rect">
@@ -4493,6 +5038,14 @@
 <file path=ppt/slides/slide7.xml><?xml version="1.0" encoding="utf-8"?>
 <p:sld xmlns:a="http://schemas.openxmlformats.org/drawingml/2006/main" xmlns:p="http://schemas.openxmlformats.org/presentationml/2006/main" xmlns:r="http://schemas.openxmlformats.org/officeDocument/2006/relationships">
   <p:cSld>
+    <p:bg>
+      <p:bgPr>
+        <a:solidFill>
+          <a:srgbClr val="F6EDD5"/>
+        </a:solidFill>
+        <a:effectLst/>
+      </p:bgPr>
+    </p:bg>
     <p:spTree>
       <p:nvGrpSpPr>
         <p:cNvPr id="1" name=""/>
@@ -4500,30 +5053,102 @@
         <p:nvPr/>
       </p:nvGrpSpPr>
       <p:grpSpPr/>
-      <p:pic>
-        <p:nvPicPr>
-          <p:cNvPr id="3" name="표지 그림" descr="news-44.jpg"/>
-          <p:cNvPicPr>
-            <a:picLocks noChangeAspect="1"/>
-          </p:cNvPicPr>
+      <p:sp>
+        <p:nvSpPr>
+          <p:cNvPr id="3" name="장식"/>
+          <p:cNvSpPr/>
           <p:nvPr/>
-        </p:nvPicPr>
-        <p:blipFill>
-          <a:blip r:embed="rId2"/>
-          <a:stretch>
-            <a:fillRect/>
-          </a:stretch>
-        </p:blipFill>
-        <p:spPr>
-          <a:xfrm>
-            <a:off x="0" y="0"/>
-            <a:ext cx="6858000" cy="6858000"/>
+        </p:nvSpPr>
+        <p:spPr>
+          <a:xfrm>
+            <a:off x="1600200" y="822960"/>
+            <a:ext cx="3657600" cy="3657600"/>
+          </a:xfrm>
+          <a:prstGeom prst="ellipse">
+            <a:avLst/>
+          </a:prstGeom>
+          <a:solidFill>
+            <a:srgbClr val="FFFFFF"/>
+          </a:solidFill>
+          <a:ln>
+            <a:noFill/>
+          </a:ln>
+        </p:spPr>
+        <p:txBody>
+          <a:bodyPr rtlCol="0" anchor="ctr"/>
+          <a:lstStyle/>
+          <a:p>
+            <a:pPr algn="ctr"/>
+          </a:p>
+        </p:txBody>
+      </p:sp>
+      <p:sp>
+        <p:nvSpPr>
+          <p:cNvPr id="4" name="장식"/>
+          <p:cNvSpPr/>
+          <p:nvPr/>
+        </p:nvSpPr>
+        <p:spPr>
+          <a:xfrm>
+            <a:off x="3246120" y="502920"/>
+            <a:ext cx="822960" cy="822960"/>
+          </a:xfrm>
+          <a:prstGeom prst="ellipse">
+            <a:avLst/>
+          </a:prstGeom>
+          <a:solidFill>
+            <a:srgbClr val="EBDAAD"/>
+          </a:solidFill>
+          <a:ln>
+            <a:noFill/>
+          </a:ln>
+        </p:spPr>
+        <p:txBody>
+          <a:bodyPr rtlCol="0" anchor="ctr"/>
+          <a:lstStyle/>
+          <a:p>
+            <a:pPr algn="ctr"/>
+          </a:p>
+        </p:txBody>
+      </p:sp>
+      <p:sp>
+        <p:nvSpPr>
+          <p:cNvPr id="5" name="라벨"/>
+          <p:cNvSpPr txBox="1"/>
+          <p:nvPr/>
+        </p:nvSpPr>
+        <p:spPr>
+          <a:xfrm>
+            <a:off x="731520" y="4572000"/>
+            <a:ext cx="5394960" cy="274320"/>
           </a:xfrm>
           <a:prstGeom prst="rect">
             <a:avLst/>
           </a:prstGeom>
-        </p:spPr>
-      </p:pic>
+          <a:noFill/>
+        </p:spPr>
+        <p:txBody>
+          <a:bodyPr wrap="square" lIns="54864" rIns="54864" tIns="27432" bIns="27432" anchor="t">
+            <a:noAutofit/>
+          </a:bodyPr>
+          <a:lstStyle/>
+          <a:p>
+            <a:pPr algn="ctr">
+              <a:lnSpc>
+                <a:spcPct val="115000"/>
+              </a:lnSpc>
+            </a:pPr>
+            <a:r>
+              <a:rPr sz="1000" b="1" i="0" spc="250">
+                <a:solidFill>
+                  <a:srgbClr val="26231F"/>
+                </a:solidFill>
+              </a:rPr>
+              <a:t>CARD NEWS</a:t>
+            </a:r>
+          </a:p>
+        </p:txBody>
+      </p:sp>
       <p:sp>
         <p:nvSpPr>
           <p:cNvPr id="2" name="Title 1"/>
@@ -4536,8 +5161,8 @@
         </p:nvSpPr>
         <p:spPr>
           <a:xfrm>
-            <a:off x="685800" y="960120"/>
-            <a:ext cx="5486400" cy="1463040"/>
+            <a:off x="731520" y="4892040"/>
+            <a:ext cx="5394960" cy="914400"/>
           </a:xfrm>
         </p:spPr>
         <p:txBody>
@@ -4546,7 +5171,7 @@
           </a:bodyPr>
           <a:lstStyle/>
           <a:p>
-            <a:pPr algn="l">
+            <a:pPr algn="ctr">
               <a:lnSpc>
                 <a:spcPct val="105000"/>
               </a:lnSpc>
@@ -4554,7 +5179,7 @@
             <a:r>
               <a:rPr sz="2800" b="1" i="0">
                 <a:solidFill>
-                  <a:srgbClr val="6E4C1C"/>
+                  <a:srgbClr val="26231F"/>
                 </a:solidFill>
               </a:rPr>
               <a:t>저장해 두고 필요할 때 꺼내 보세요</a:t>
@@ -4564,14 +5189,14 @@
       </p:sp>
       <p:sp>
         <p:nvSpPr>
-          <p:cNvPr id="4" name="한 줄 문구"/>
+          <p:cNvPr id="6" name="한 줄 문구"/>
           <p:cNvSpPr txBox="1"/>
           <p:nvPr/>
         </p:nvSpPr>
         <p:spPr>
           <a:xfrm>
-            <a:off x="685800" y="2560320"/>
-            <a:ext cx="5486400" cy="822960"/>
+            <a:off x="731520" y="5806440"/>
+            <a:ext cx="5394960" cy="822960"/>
           </a:xfrm>
           <a:prstGeom prst="rect">
             <a:avLst/>
@@ -4584,15 +5209,15 @@
           </a:bodyPr>
           <a:lstStyle/>
           <a:p>
-            <a:pPr algn="l">
+            <a:pPr algn="ctr">
               <a:lnSpc>
                 <a:spcPct val="115000"/>
               </a:lnSpc>
             </a:pPr>
             <a:r>
-              <a:rPr sz="1500" b="0" i="1">
+              <a:rPr sz="1500" b="0" i="0">
                 <a:solidFill>
-                  <a:srgbClr val="6E4C1C"/>
+                  <a:srgbClr val="26231F"/>
                 </a:solidFill>
               </a:rPr>
               <a:t>마음에 들면 공유해 주세요</a:t>
@@ -4602,14 +5227,14 @@
       </p:sp>
       <p:sp>
         <p:nvSpPr>
-          <p:cNvPr id="5" name="안내 문구"/>
+          <p:cNvPr id="7" name="안내 문구"/>
           <p:cNvSpPr txBox="1"/>
           <p:nvPr/>
         </p:nvSpPr>
         <p:spPr>
           <a:xfrm>
-            <a:off x="685800" y="3429000"/>
-            <a:ext cx="5486400" cy="914400"/>
+            <a:off x="731520" y="6675120"/>
+            <a:ext cx="5394960" cy="914400"/>
           </a:xfrm>
           <a:prstGeom prst="rect">
             <a:avLst/>
@@ -4622,7 +5247,7 @@
           </a:bodyPr>
           <a:lstStyle/>
           <a:p>
-            <a:pPr algn="l">
+            <a:pPr algn="ctr">
               <a:lnSpc>
                 <a:spcPct val="115000"/>
               </a:lnSpc>
@@ -4630,7 +5255,7 @@
             <a:r>
               <a:rPr sz="1200" b="0" i="0">
                 <a:solidFill>
-                  <a:srgbClr val="666666"/>
+                  <a:srgbClr val="26231F"/>
                 </a:solidFill>
               </a:rPr>
               <a:t>이름 · 연락처를 입력하세요</a:t>
@@ -4657,34 +5282,34 @@
         <a:sysClr val="window" lastClr="FFFFFF"/>
       </a:lt1>
       <a:dk2>
-        <a:srgbClr val="6E4C1C"/>
+        <a:srgbClr val="494027"/>
       </a:dk2>
       <a:lt2>
-        <a:srgbClr val="FEFBF6"/>
+        <a:srgbClr val="FBF7EC"/>
       </a:lt2>
       <a:accent1>
-        <a:srgbClr val="ECA33C"/>
+        <a:srgbClr val="E1CE98"/>
       </a:accent1>
       <a:accent2>
-        <a:srgbClr val="1990E6"/>
+        <a:srgbClr val="E0EAB8"/>
       </a:accent2>
       <a:accent3>
-        <a:srgbClr val="6E4C1C"/>
+        <a:srgbClr val="494027"/>
       </a:accent3>
       <a:accent4>
-        <a:srgbClr val="FDF0DD"/>
+        <a:srgbClr val="F6EDD5"/>
       </a:accent4>
       <a:accent5>
-        <a:srgbClr val="829A91"/>
+        <a:srgbClr val="E0DCA8"/>
       </a:accent5>
       <a:accent6>
-        <a:srgbClr val="A89477"/>
+        <a:srgbClr val="928C7D"/>
       </a:accent6>
       <a:hlink>
-        <a:srgbClr val="ECA33C"/>
+        <a:srgbClr val="E1CE98"/>
       </a:hlink>
       <a:folHlink>
-        <a:srgbClr val="6E4C1C"/>
+        <a:srgbClr val="494027"/>
       </a:folHlink>
     </a:clrScheme>
     <a:fontScheme name="Office">
